--- a/classes/parte-1-machine-learning-clasico/087-shap-en-profundidad-treeexplainer-deepexplainer/clase-087-shap-en-profundidad-treeexplainer-deepexplainer-presentacion.pptx
+++ b/classes/parte-1-machine-learning-clasico/087-shap-en-profundidad-treeexplainer-deepexplainer/clase-087-shap-en-profundidad-treeexplainer-deepexplainer-presentacion.pptx
@@ -3272,7 +3272,7 @@
                 </a:solidFill>
                 <a:latin typeface="Segoe UI"/>
               </a:rPr>
-              <a:t>Parte: 1 — Machine Learning Clásico · Fuente: Lundberg &amp; Lee (2017) + shap docs.  Duración estimada: 90 min.</a:t>
+              <a:t>Parte: 1 — Machine Learning Clásico · Fuente: Lundberg &amp; Lee (2017) + shap docs.  Duración estimada: 90 min. · Nivel: Avanzado</a:t>
             </a:r>
           </a:p>
         </p:txBody>
@@ -3581,7 +3581,7 @@
                 </a:solidFill>
                 <a:latin typeface="Segoe UI"/>
               </a:rPr>
-              <a:t>Parte: 1 — Machine Learning Clásico · Fuente: Lundberg &amp; Lee (2017) + shap docs.  Duración estimada: 90 min.</a:t>
+              <a:t>Parte: 1 — Machine Learning Clásico · Fuente: Lundberg &amp; Lee (2017) + shap docs.  Duración estimada: 90 min. · Nivel: Avanzado</a:t>
             </a:r>
           </a:p>
         </p:txBody>
